--- a/3-Master_Plan/re_entry/HEROs_and_PASSes/slides/auto/CHAR_lc_congestion_characterization_AUTO.pptx
+++ b/3-Master_Plan/re_entry/HEROs_and_PASSes/slides/auto/CHAR_lc_congestion_characterization_AUTO.pptx
@@ -3193,7 +3193,7 @@
           <a:p>
             <a:r>
               <a:rPr sz="900"/>
-              <a:t>PD16: team </a:t>
+              <a:t>team </a:t>
             </a:r>
             <a:r>
               <a:rPr sz="900" i="1">
@@ -3219,14 +3219,14 @@
             </a:r>
             <a:r>
               <a:rPr sz="900"/>
-              <a:t> = 0.804 (naive draft); suffix=_pd16 · 48 bins · 350 teams · seed 42</a:t>
+              <a:t> = 0.804 (naive draft) · 48 bins · 350 teams · seed 42</a:t>
             </a:r>
           </a:p>
         </p:txBody>
       </p:sp>
       <p:pic>
         <p:nvPicPr>
-          <p:cNvPr id="4" name="Picture 3" descr="LC_distribution_vs_rho_1d_strip_pd16.png"/>
+          <p:cNvPr id="4" name="Picture 3" descr="LC_distribution_vs_rho_1d_strip.png"/>
           <p:cNvPicPr>
             <a:picLocks noChangeAspect="1"/>
           </p:cNvPicPr>
@@ -3240,8 +3240,8 @@
         </p:blipFill>
         <p:spPr>
           <a:xfrm>
-            <a:off x="320040" y="2709049376445"/>
-            <a:ext cx="11551615" cy="6539909"/>
+            <a:off x="320040" y="2709048609898"/>
+            <a:ext cx="11551615" cy="8073004"/>
           </a:xfrm>
           <a:prstGeom prst="rect">
             <a:avLst/>
@@ -3282,12 +3282,32 @@
             </a:r>
             <a:r>
               <a:rPr sz="900"/>
-              <a:t> = one narrow spike near </a:t>
+              <a:t> (</a:t>
             </a:r>
             <a:r>
               <a:rPr sz="900" i="1">
                 <a:latin typeface="Cambria Math"/>
               </a:rPr>
+              <a:t>ρ=0.001</a:t>
+            </a:r>
+            <a:r>
+              <a:rPr sz="900"/>
+              <a:t>, </a:t>
+            </a:r>
+            <a:r>
+              <a:rPr sz="900" i="1">
+                <a:latin typeface="Cambria Math"/>
+              </a:rPr>
+              <a:t>1</a:t>
+            </a:r>
+            <a:r>
+              <a:rPr sz="900"/>
+              <a:t>) = one narrow spike near </a:t>
+            </a:r>
+            <a:r>
+              <a:rPr sz="900" i="1">
+                <a:latin typeface="Cambria Math"/>
+              </a:rPr>
               <a:t>L</a:t>
             </a:r>
             <a:r>
@@ -3301,10 +3321,6 @@
                 <a:latin typeface="Cambria Math"/>
               </a:rPr>
               <a:t>≈ 0.15</a:t>
-            </a:r>
-            <a:r>
-              <a:rPr sz="900"/>
-              <a:t>. First 3 panels</a:t>
             </a:r>
           </a:p>
         </p:txBody>
@@ -3771,7 +3787,7 @@
           <a:p>
             <a:r>
               <a:rPr sz="900"/>
-              <a:t>PD16: team </a:t>
+              <a:t>team </a:t>
             </a:r>
             <a:r>
               <a:rPr sz="900" i="1">
@@ -3797,7 +3813,7 @@
             </a:r>
             <a:r>
               <a:rPr sz="900"/>
-              <a:t> = 0.804 (naive draft); suffix=_pd16 · 48 bins · 350 teams · seed 42</a:t>
+              <a:t> = 0.804 (naive draft) · 48 bins · 350 teams · seed 42</a:t>
             </a:r>
           </a:p>
         </p:txBody>
@@ -4081,7 +4097,7 @@
       </p:sp>
       <p:pic>
         <p:nvPicPr>
-          <p:cNvPr id="5" name="Picture 4" descr="LC_distribution_vs_rho_2d_pd16.png"/>
+          <p:cNvPr id="5" name="Picture 4" descr="LC_distribution_vs_rho_2d.png"/>
           <p:cNvPicPr>
             <a:picLocks noChangeAspect="1"/>
           </p:cNvPicPr>
@@ -4095,8 +4111,8 @@
         </p:blipFill>
         <p:spPr>
           <a:xfrm>
-            <a:off x="3383280" y="3156378269873"/>
-            <a:ext cx="8488375" cy="5028254"/>
+            <a:off x="3383280" y="3156376992483"/>
+            <a:ext cx="8488375" cy="7583034"/>
           </a:xfrm>
           <a:prstGeom prst="rect">
             <a:avLst/>
